--- a/catalog/samples/chevron_rail.pptx
+++ b/catalog/samples/chevron_rail.pptx
@@ -1422,7 +1422,7 @@
           </a:p>
           <a:p>
             <a:r>
-              <a:t>  "template_sha256": "7417874296707e2b8d111c5ee7e5c80d410030a9b45423adaed4b21375af5007"</a:t>
+              <a:t>  "template_sha256": "e42da66d99a5d18d3862b9ca6cf7222b64a24566ba67a427558243a5ede1315d"</a:t>
             </a:r>
           </a:p>
           <a:p>
